--- a/p02/A-frame-geometric-objects.pptx
+++ b/p02/A-frame-geometric-objects.pptx
@@ -6721,14 +6721,30 @@
             </a:r>
             <a:r>
               <a:rPr lang="en-US" sz="2800" dirty="0"/>
-              <a:t> id="</a:t>
-            </a:r>
-            <a:r>
-              <a:rPr lang="en-US" sz="2800" dirty="0" err="1"/>
+              <a:t> </a:t>
+            </a:r>
+            <a:r>
+              <a:rPr lang="en-US" sz="2800" dirty="0">
+                <a:solidFill>
+                  <a:srgbClr val="FF0000"/>
+                </a:solidFill>
+              </a:rPr>
+              <a:t>id="</a:t>
+            </a:r>
+            <a:r>
+              <a:rPr lang="en-US" sz="2800" dirty="0" err="1">
+                <a:solidFill>
+                  <a:srgbClr val="FF0000"/>
+                </a:solidFill>
+              </a:rPr>
               <a:t>boxTexture</a:t>
             </a:r>
             <a:r>
-              <a:rPr lang="en-US" sz="2800" dirty="0"/>
+              <a:rPr lang="en-US" sz="2800" dirty="0">
+                <a:solidFill>
+                  <a:srgbClr val="FF0000"/>
+                </a:solidFill>
+              </a:rPr>
               <a:t>" </a:t>
             </a:r>
             <a:r>
@@ -6770,15 +6786,35 @@
             </a:r>
             <a:r>
               <a:rPr lang="en-US" dirty="0"/>
-              <a:t>= “#</a:t>
-            </a:r>
-            <a:r>
-              <a:rPr lang="en-US" sz="2800" dirty="0" err="1"/>
+              <a:t>= </a:t>
+            </a:r>
+            <a:r>
+              <a:rPr lang="en-US" dirty="0">
+                <a:solidFill>
+                  <a:srgbClr val="FF0000"/>
+                </a:solidFill>
+              </a:rPr>
+              <a:t>"#</a:t>
+            </a:r>
+            <a:r>
+              <a:rPr lang="en-US" sz="2800" dirty="0" err="1">
+                <a:solidFill>
+                  <a:srgbClr val="FF0000"/>
+                </a:solidFill>
+              </a:rPr>
               <a:t>boxTexture</a:t>
             </a:r>
             <a:r>
+              <a:rPr lang="en-US" dirty="0">
+                <a:solidFill>
+                  <a:srgbClr val="FF0000"/>
+                </a:solidFill>
+              </a:rPr>
+              <a:t>" </a:t>
+            </a:r>
+            <a:r>
               <a:rPr lang="en-US" dirty="0"/>
-              <a:t>" radius="1"&gt;&lt;/a-box&gt;</a:t>
+              <a:t>radius="1"&gt;&lt;/a-box&gt;</a:t>
             </a:r>
           </a:p>
           <a:p>
